--- a/report/2026_07_17_competitive_report_no_limit.pptx
+++ b/report/2026_07_17_competitive_report_no_limit.pptx
@@ -12,6 +12,7 @@
     <p:sldId id="260" r:id="rId11"/>
     <p:sldId id="261" r:id="rId12"/>
     <p:sldId id="262" r:id="rId13"/>
+    <p:sldId id="263" r:id="rId14"/>
   </p:sldIdLst>
   <p:sldSz cx="12188952" cy="6858000" type="screen4x3"/>
   <p:notesSz cx="6858000" cy="9144000"/>
@@ -3253,7 +3254,7 @@
               </a:defRPr>
             </a:pPr>
             <a:r>
-              <a:t>・   阪急オアシスは、大阪府豊中市にある服部西店を本日7月17日に価格訴求型の「デイリーマート」業態へ改装オープンし、地域における競争力を強化しています。</a:t>
+              <a:t>・   コープこうべは、2026年度の営業終了候補店として大阪府吹田市、兵庫県川西市、西宮市、三木市、明石市、赤穂郡上郡町で計6店舗を発表しており、9月までの業績改善状況を鑑みて営業継続の可否を判断する予定です。これにより、該当エリアでの競合環境が変化する可能性があります。</a:t>
             </a:r>
           </a:p>
           <a:p>
@@ -3268,7 +3269,7 @@
               </a:defRPr>
             </a:pPr>
             <a:r>
-              <a:t>・   ディスカウントスーパーのオーケーが大阪府内での出店を加速しており、9月1日に高槻赤大路店、10月下旬に長吉店を新規オープンする予定です。これにより、高槻市および大阪市平野区周辺での価格競争が激化する可能性があります。</a:t>
+              <a:t>・   ライフコーポレーションは、大阪市北区に「（仮称）ライフ豊崎店」を2026年8月4日ごろに新規開業する予定であり、梅田・大阪駅周辺エリアの競争が激化する見込みです。</a:t>
             </a:r>
           </a:p>
           <a:p>
@@ -3283,22 +3284,7 @@
               </a:defRPr>
             </a:pPr>
             <a:r>
-              <a:t>・   さとうは兵庫県川辺郡猪名川町に「（仮称）フレッシュバザール猪名川店」を2027年1月28日に新設予定であり、北摂・阪神間北部の郊外エリアでの競争が今後活発化する見込みです。</a:t>
-            </a:r>
-          </a:p>
-          <a:p>
-            <a:pPr>
-              <a:spcAft>
-                <a:spcPts val="1600"/>
-              </a:spcAft>
-              <a:defRPr sz="1800">
-                <a:solidFill>
-                  <a:srgbClr val="1E1E1E"/>
-                </a:solidFill>
-              </a:defRPr>
-            </a:pPr>
-            <a:r>
-              <a:t>・   関西スーパー蒲生店が7月30日から8月6日まで臨時休業を予定しており、改装等による店舗力強化の動きが示唆されます。</a:t>
+              <a:t>・   万代は、大阪府東大阪市に「（仮称）万代荒本店」を2026年9月21日に、大阪府和泉市に「（仮称）和泉市観音寺複合施設」を2026年11月14日にそれぞれ新規出店する予定であり、大阪府下の広範なエリアで競争が活発化する可能性があります。</a:t>
             </a:r>
           </a:p>
         </p:txBody>
@@ -3383,7 +3369,7 @@
                 <a:gridCol w="914400"/>
                 <a:gridCol w="4142232"/>
               </a:tblGrid>
-              <a:tr h="792480">
+              <a:tr h="679268">
                 <a:tc>
                   <a:txBody>
                     <a:bodyPr/>
@@ -3546,7 +3532,7 @@
                   </a:tcPr>
                 </a:tc>
               </a:tr>
-              <a:tr h="792480">
+              <a:tr h="679268">
                 <a:tc>
                   <a:txBody>
                     <a:bodyPr/>
@@ -3560,7 +3546,7 @@
                         </a:defRPr>
                       </a:pPr>
                       <a:r>
-                        <a:t>大阪府豊中市</a:t>
+                        <a:t>大阪府吹田市</a:t>
                       </a:r>
                     </a:p>
                   </a:txBody>
@@ -3583,7 +3569,7 @@
                         </a:defRPr>
                       </a:pPr>
                       <a:r>
-                        <a:t>阪急オアシスデイリーマート服部西店</a:t>
+                        <a:t>コープ吹田</a:t>
                       </a:r>
                     </a:p>
                   </a:txBody>
@@ -3606,7 +3592,7 @@
                         </a:defRPr>
                       </a:pPr>
                       <a:r>
-                        <a:t>2026年7月17日</a:t>
+                        <a:t>2026年度中 (9月までに判断)</a:t>
                       </a:r>
                     </a:p>
                   </a:txBody>
@@ -3629,7 +3615,7 @@
                         </a:defRPr>
                       </a:pPr>
                       <a:r>
-                        <a:t>リニューアルオープン</a:t>
+                        <a:t>営業終了候補店 (閉店の可能性)</a:t>
                       </a:r>
                     </a:p>
                   </a:txBody>
@@ -3652,7 +3638,7 @@
                         </a:defRPr>
                       </a:pPr>
                       <a:r>
-                        <a:t>豊中店, 豊中緑丘店</a:t>
+                        <a:t>王子店</a:t>
                       </a:r>
                     </a:p>
                   </a:txBody>
@@ -3675,7 +3661,7 @@
                         </a:defRPr>
                       </a:pPr>
                       <a:r>
-                        <a:t>中程度</a:t>
+                        <a:t>低〜中程度</a:t>
                       </a:r>
                     </a:p>
                   </a:txBody>
@@ -3698,7 +3684,7 @@
                         </a:defRPr>
                       </a:pPr>
                       <a:r>
-                        <a:t>阪急オアシス服部西店が、価格訴求型の「デイリーマート」としてリニューアルオープンしました。関西フードマーケットは価値訴求型の「マルシェ」と価格訴求型の「デイリーマート」の2つのフォーマットへの業態転換を進めており、服部西店はこの戦略の一環です。</a:t>
+                        <a:t>コープこうべは、2026年度の営業終了候補店として吹田店を挙げ、9月までの業績改善状況により営業継続を判断します。 閉店に至った場合、近隣の競合店舗にとって顧客獲得の機会が生まれる可能性があります。</a:t>
                       </a:r>
                     </a:p>
                   </a:txBody>
@@ -3709,7 +3695,7 @@
                   </a:tcPr>
                 </a:tc>
               </a:tr>
-              <a:tr h="792480">
+              <a:tr h="679268">
                 <a:tc>
                   <a:txBody>
                     <a:bodyPr/>
@@ -3723,7 +3709,7 @@
                         </a:defRPr>
                       </a:pPr>
                       <a:r>
-                        <a:t>大阪府高槻市</a:t>
+                        <a:t>兵庫県川西市</a:t>
                       </a:r>
                     </a:p>
                   </a:txBody>
@@ -3742,7 +3728,7 @@
                         </a:defRPr>
                       </a:pPr>
                       <a:r>
-                        <a:t>オーケー高槻赤大路店</a:t>
+                        <a:t>コープミニけやき坂</a:t>
                       </a:r>
                     </a:p>
                   </a:txBody>
@@ -3761,7 +3747,7 @@
                         </a:defRPr>
                       </a:pPr>
                       <a:r>
-                        <a:t>2026年9月1日</a:t>
+                        <a:t>2026年度中 (9月までに判断)</a:t>
                       </a:r>
                     </a:p>
                   </a:txBody>
@@ -3780,7 +3766,7 @@
                         </a:defRPr>
                       </a:pPr>
                       <a:r>
-                        <a:t>新規オープン</a:t>
+                        <a:t>営業終了候補店 (閉店の可能性)</a:t>
                       </a:r>
                     </a:p>
                   </a:txBody>
@@ -3799,7 +3785,7 @@
                         </a:defRPr>
                       </a:pPr>
                       <a:r>
-                        <a:t>高槻店</a:t>
+                        <a:t>宝塚店, 阪急逆瀬川店, 箕面店</a:t>
                       </a:r>
                     </a:p>
                   </a:txBody>
@@ -3818,7 +3804,7 @@
                         </a:defRPr>
                       </a:pPr>
                       <a:r>
-                        <a:t>中程度</a:t>
+                        <a:t>低程度</a:t>
                       </a:r>
                     </a:p>
                   </a:txBody>
@@ -3837,14 +3823,14 @@
                         </a:defRPr>
                       </a:pPr>
                       <a:r>
-                        <a:t>ディスカウントスーパーのオーケーが大阪府高槻市に新規出店します。「高品質・Everyday Low Price」を経営方針に掲げるディスカウントスーパーマーケットであり、地域住民の価格志向のニーズに応えることが予想されます。</a:t>
+                        <a:t>コープこうべの営業終了候補店の一つ。 閉店の可能性があるため、周辺エリアのスーパーマーケットの顧客流動に影響を与える可能性があります。</a:t>
                       </a:r>
                     </a:p>
                   </a:txBody>
                   <a:tcPr/>
                 </a:tc>
               </a:tr>
-              <a:tr h="792480">
+              <a:tr h="679268">
                 <a:tc>
                   <a:txBody>
                     <a:bodyPr/>
@@ -3858,7 +3844,7 @@
                         </a:defRPr>
                       </a:pPr>
                       <a:r>
-                        <a:t>大阪府大阪市平野区</a:t>
+                        <a:t>兵庫県西宮市</a:t>
                       </a:r>
                     </a:p>
                   </a:txBody>
@@ -3881,7 +3867,7 @@
                         </a:defRPr>
                       </a:pPr>
                       <a:r>
-                        <a:t>オーケー長吉店</a:t>
+                        <a:t>コープ西宮南</a:t>
                       </a:r>
                     </a:p>
                   </a:txBody>
@@ -3904,7 +3890,7 @@
                         </a:defRPr>
                       </a:pPr>
                       <a:r>
-                        <a:t>2026年10月下旬</a:t>
+                        <a:t>2026年度中 (9月までに判断)</a:t>
                       </a:r>
                     </a:p>
                   </a:txBody>
@@ -3927,7 +3913,7 @@
                         </a:defRPr>
                       </a:pPr>
                       <a:r>
-                        <a:t>新規オープン</a:t>
+                        <a:t>営業終了候補店 (閉店の可能性)</a:t>
                       </a:r>
                     </a:p>
                   </a:txBody>
@@ -3950,7 +3936,7 @@
                         </a:defRPr>
                       </a:pPr>
                       <a:r>
-                        <a:t>南海なんば店, JR大阪店</a:t>
+                        <a:t>甲子園店</a:t>
                       </a:r>
                     </a:p>
                   </a:txBody>
@@ -3973,7 +3959,7 @@
                         </a:defRPr>
                       </a:pPr>
                       <a:r>
-                        <a:t>中程度</a:t>
+                        <a:t>低程度</a:t>
                       </a:r>
                     </a:p>
                   </a:txBody>
@@ -3996,7 +3982,7 @@
                         </a:defRPr>
                       </a:pPr>
                       <a:r>
-                        <a:t>オーケーが大阪市平野区に新規出店予定です。同社は2026年度に大阪府内で計7店舗の出店を計画しており、長吉店もその一環としてディスカウント業態での展開が予想されます。</a:t>
+                        <a:t>コープこうべの営業終了候補店の一つ。 周辺のスーパーマーケットは、この動向を注視する必要があるでしょう。</a:t>
                       </a:r>
                     </a:p>
                   </a:txBody>
@@ -4007,7 +3993,7 @@
                   </a:tcPr>
                 </a:tc>
               </a:tr>
-              <a:tr h="792480">
+              <a:tr h="679268">
                 <a:tc>
                   <a:txBody>
                     <a:bodyPr/>
@@ -4021,7 +4007,7 @@
                         </a:defRPr>
                       </a:pPr>
                       <a:r>
-                        <a:t>兵庫県川辺郡猪名川町</a:t>
+                        <a:t>兵庫県三木市</a:t>
                       </a:r>
                     </a:p>
                   </a:txBody>
@@ -4040,7 +4026,7 @@
                         </a:defRPr>
                       </a:pPr>
                       <a:r>
-                        <a:t>(仮称)フレッシュバザール猪名川店</a:t>
+                        <a:t>コープ志染</a:t>
                       </a:r>
                     </a:p>
                   </a:txBody>
@@ -4059,7 +4045,7 @@
                         </a:defRPr>
                       </a:pPr>
                       <a:r>
-                        <a:t>2027年1月28日</a:t>
+                        <a:t>2026年度中 (9月までに判断)</a:t>
                       </a:r>
                     </a:p>
                   </a:txBody>
@@ -4078,7 +4064,7 @@
                         </a:defRPr>
                       </a:pPr>
                       <a:r>
-                        <a:t>新規オープン</a:t>
+                        <a:t>営業終了候補店 (閉店の可能性)</a:t>
                       </a:r>
                     </a:p>
                   </a:txBody>
@@ -4097,7 +4083,7 @@
                         </a:defRPr>
                       </a:pPr>
                       <a:r>
-                        <a:t>宝塚店, 阪急逆瀬川店, 箕面店, 有野店</a:t>
+                        <a:t>関西全域</a:t>
                       </a:r>
                     </a:p>
                   </a:txBody>
@@ -4116,7 +4102,7 @@
                         </a:defRPr>
                       </a:pPr>
                       <a:r>
-                        <a:t>中程度</a:t>
+                        <a:t>低程度</a:t>
                       </a:r>
                     </a:p>
                   </a:txBody>
@@ -4135,14 +4121,14 @@
                         </a:defRPr>
                       </a:pPr>
                       <a:r>
-                        <a:t>さとうが兵庫県川辺郡猪名川町に新たなスーパーマーケット「（仮称）フレッシュバザール猪名川店」を新設する予定です。店舗面積1536㎡の郊外型店舗であり、広域からの集客も視野に入れていると考えられます。</a:t>
+                        <a:t>コープこうべの営業終了候補店の一つ。 広域的な顧客流動に影響を与える可能性があります。</a:t>
                       </a:r>
                     </a:p>
                   </a:txBody>
                   <a:tcPr/>
                 </a:tc>
               </a:tr>
-              <a:tr h="792480">
+              <a:tr h="679268">
                 <a:tc>
                   <a:txBody>
                     <a:bodyPr/>
@@ -4156,7 +4142,7 @@
                         </a:defRPr>
                       </a:pPr>
                       <a:r>
-                        <a:t>大阪府大阪市城東区 (推定)</a:t>
+                        <a:t>兵庫県明石市</a:t>
                       </a:r>
                     </a:p>
                   </a:txBody>
@@ -4179,7 +4165,7 @@
                         </a:defRPr>
                       </a:pPr>
                       <a:r>
-                        <a:t>関西スーパー蒲生店</a:t>
+                        <a:t>コープ朝霧</a:t>
                       </a:r>
                     </a:p>
                   </a:txBody>
@@ -4202,7 +4188,7 @@
                         </a:defRPr>
                       </a:pPr>
                       <a:r>
-                        <a:t>2026年7月30日〜2026年8月6日</a:t>
+                        <a:t>2026年度中 (9月までに判断)</a:t>
                       </a:r>
                     </a:p>
                   </a:txBody>
@@ -4225,7 +4211,7 @@
                         </a:defRPr>
                       </a:pPr>
                       <a:r>
-                        <a:t>臨時休業 (改装の可能性)</a:t>
+                        <a:t>営業終了候補店 (閉店の可能性)</a:t>
                       </a:r>
                     </a:p>
                   </a:txBody>
@@ -4248,7 +4234,7 @@
                         </a:defRPr>
                       </a:pPr>
                       <a:r>
-                        <a:t>JR大阪店</a:t>
+                        <a:t>関西全域</a:t>
                       </a:r>
                     </a:p>
                   </a:txBody>
@@ -4271,7 +4257,7 @@
                         </a:defRPr>
                       </a:pPr>
                       <a:r>
-                        <a:t>低〜中程度</a:t>
+                        <a:t>低程度</a:t>
                       </a:r>
                     </a:p>
                   </a:txBody>
@@ -4294,7 +4280,7 @@
                         </a:defRPr>
                       </a:pPr>
                       <a:r>
-                        <a:t>関西スーパー蒲生店が臨時休業する旨が発表されました。詳細は不明ですが、改装や一時的な運営変更である可能性があり、今後のサービス強化に繋がる可能性があります。</a:t>
+                        <a:t>コープこうべの営業終了候補店の一つ。 広域的な顧客流動に影響を与える可能性があります。</a:t>
                       </a:r>
                     </a:p>
                   </a:txBody>
@@ -4303,6 +4289,141 @@
                       <a:srgbClr val="F5F5F5"/>
                     </a:solidFill>
                   </a:tcPr>
+                </a:tc>
+              </a:tr>
+              <a:tr h="679272">
+                <a:tc>
+                  <a:txBody>
+                    <a:bodyPr/>
+                    <a:lstStyle/>
+                    <a:p>
+                      <a:pPr>
+                        <a:defRPr sz="950">
+                          <a:solidFill>
+                            <a:srgbClr val="1E1E1E"/>
+                          </a:solidFill>
+                        </a:defRPr>
+                      </a:pPr>
+                      <a:r>
+                        <a:t>兵庫県赤穂郡上郡町</a:t>
+                      </a:r>
+                    </a:p>
+                  </a:txBody>
+                  <a:tcPr/>
+                </a:tc>
+                <a:tc>
+                  <a:txBody>
+                    <a:bodyPr/>
+                    <a:lstStyle/>
+                    <a:p>
+                      <a:pPr>
+                        <a:defRPr sz="950">
+                          <a:solidFill>
+                            <a:srgbClr val="1E1E1E"/>
+                          </a:solidFill>
+                        </a:defRPr>
+                      </a:pPr>
+                      <a:r>
+                        <a:t>コープ上郡</a:t>
+                      </a:r>
+                    </a:p>
+                  </a:txBody>
+                  <a:tcPr/>
+                </a:tc>
+                <a:tc>
+                  <a:txBody>
+                    <a:bodyPr/>
+                    <a:lstStyle/>
+                    <a:p>
+                      <a:pPr>
+                        <a:defRPr sz="950">
+                          <a:solidFill>
+                            <a:srgbClr val="1E1E1E"/>
+                          </a:solidFill>
+                        </a:defRPr>
+                      </a:pPr>
+                      <a:r>
+                        <a:t>2026年度中 (9月までに判断)</a:t>
+                      </a:r>
+                    </a:p>
+                  </a:txBody>
+                  <a:tcPr/>
+                </a:tc>
+                <a:tc>
+                  <a:txBody>
+                    <a:bodyPr/>
+                    <a:lstStyle/>
+                    <a:p>
+                      <a:pPr>
+                        <a:defRPr sz="950">
+                          <a:solidFill>
+                            <a:srgbClr val="1E1E1E"/>
+                          </a:solidFill>
+                        </a:defRPr>
+                      </a:pPr>
+                      <a:r>
+                        <a:t>営業終了候補店 (閉店の可能性)</a:t>
+                      </a:r>
+                    </a:p>
+                  </a:txBody>
+                  <a:tcPr/>
+                </a:tc>
+                <a:tc>
+                  <a:txBody>
+                    <a:bodyPr/>
+                    <a:lstStyle/>
+                    <a:p>
+                      <a:pPr>
+                        <a:defRPr sz="950">
+                          <a:solidFill>
+                            <a:srgbClr val="1E1E1E"/>
+                          </a:solidFill>
+                        </a:defRPr>
+                      </a:pPr>
+                      <a:r>
+                        <a:t>関西全域</a:t>
+                      </a:r>
+                    </a:p>
+                  </a:txBody>
+                  <a:tcPr/>
+                </a:tc>
+                <a:tc>
+                  <a:txBody>
+                    <a:bodyPr/>
+                    <a:lstStyle/>
+                    <a:p>
+                      <a:pPr>
+                        <a:defRPr sz="950">
+                          <a:solidFill>
+                            <a:srgbClr val="1E1E1E"/>
+                          </a:solidFill>
+                        </a:defRPr>
+                      </a:pPr>
+                      <a:r>
+                        <a:t>低程度</a:t>
+                      </a:r>
+                    </a:p>
+                  </a:txBody>
+                  <a:tcPr/>
+                </a:tc>
+                <a:tc>
+                  <a:txBody>
+                    <a:bodyPr/>
+                    <a:lstStyle/>
+                    <a:p>
+                      <a:pPr>
+                        <a:defRPr sz="950">
+                          <a:solidFill>
+                            <a:srgbClr val="1E1E1E"/>
+                          </a:solidFill>
+                        </a:defRPr>
+                      </a:pPr>
+                      <a:r>
+                        <a:t>コープこうべの営業終了候補店の一つ。 広域的な顧客流動に影響を与える可能性があります。</a:t>
+                      </a:r>
+                    </a:p>
+                  </a:txBody>
+                  <a:tcPr/>
                 </a:tc>
               </a:tr>
             </a:tbl>
@@ -4357,49 +4478,666 @@
               </a:defRPr>
             </a:pPr>
             <a:r>
-              <a:t>c) 【地図的分析】</a:t>
-            </a:r>
-          </a:p>
-        </p:txBody>
-      </p:sp>
-      <p:sp>
-        <p:nvSpPr>
-          <p:cNvPr id="3" name="TextBox 2"/>
-          <p:cNvSpPr txBox="1"/>
+              <a:t>b) 【詳細】 (2ページ目)</a:t>
+            </a:r>
+          </a:p>
+        </p:txBody>
+      </p:sp>
+      <p:graphicFrame>
+        <p:nvGraphicFramePr>
+          <p:cNvPr id="3" name="Table 2"/>
+          <p:cNvGraphicFramePr>
+            <a:graphicFrameLocks noGrp="1"/>
+          </p:cNvGraphicFramePr>
           <p:nvPr/>
-        </p:nvSpPr>
-        <p:spPr>
-          <a:xfrm>
-            <a:off x="685800" y="1280160"/>
-            <a:ext cx="10817352" cy="4846320"/>
-          </a:xfrm>
-          <a:prstGeom prst="rect">
-            <a:avLst/>
-          </a:prstGeom>
-          <a:noFill/>
-        </p:spPr>
-        <p:txBody>
-          <a:bodyPr wrap="square">
-            <a:spAutoFit/>
-          </a:bodyPr>
-          <a:lstStyle/>
-          <a:p>
-            <a:pPr>
-              <a:spcAft>
-                <a:spcPts val="1400"/>
-              </a:spcAft>
-              <a:defRPr sz="1400">
-                <a:solidFill>
-                  <a:srgbClr val="1E1E1E"/>
-                </a:solidFill>
-              </a:defRPr>
-            </a:pPr>
-            <a:r>
-              <a:t>本日リニューアルオープンした阪急オアシスデイリーマート服部西店は、いかり豊中店・豊中緑丘店から比較的近い豊中市服部豊町に位置しており、特に豊中エリアでの競争が強化されることが予測されます。オーケー高槻赤大路店は、いかり高槻店から約1km圏内に位置し、主要幹線道路沿いであることから、車での来店者を中心に価格競争が激化する可能性があります。オーケー長吉店は大阪市平野区に位置し、いかり南海なんば店やJR大阪店からはやや距離があるものの、広範なエリアからの集客を目指すディスカウントスーパーとして、広域的な顧客層に影響を与える可能性があります。兵庫県川辺郡猪名川町に新設予定のフレッシュバザール猪名川店は、いかり宝塚店、阪急逆瀬川店、箕面店、有野店などの北摂・阪神間北部の店舗網に広域的に影響を与える可能性があります。関西スーパー蒲生店（大阪市城東区と推定）の臨時休業はいかりJR大阪店への直接的な影響は小さいと見られますが、改装後のサービス強化によっては周辺の顧客流動に変化が生じる可能性があります。</a:t>
-            </a:r>
-          </a:p>
-        </p:txBody>
-      </p:sp>
+        </p:nvGraphicFramePr>
+        <p:xfrm>
+          <a:off x="685800" y="1280160"/>
+          <a:ext cx="10817352" cy="4754880"/>
+        </p:xfrm>
+        <a:graphic>
+          <a:graphicData uri="http://schemas.openxmlformats.org/drawingml/2006/table">
+            <a:tbl>
+              <a:tblPr firstRow="1" bandRow="1">
+                <a:tableStyleId>{5C22544A-7EE6-4342-B048-85BDC9FD1C3A}</a:tableStyleId>
+              </a:tblPr>
+              <a:tblGrid>
+                <a:gridCol w="914400"/>
+                <a:gridCol w="1645920"/>
+                <a:gridCol w="914400"/>
+                <a:gridCol w="914400"/>
+                <a:gridCol w="1371600"/>
+                <a:gridCol w="914400"/>
+                <a:gridCol w="4142232"/>
+              </a:tblGrid>
+              <a:tr h="1188720">
+                <a:tc>
+                  <a:txBody>
+                    <a:bodyPr/>
+                    <a:lstStyle/>
+                    <a:p>
+                      <a:pPr algn="ctr">
+                        <a:defRPr b="1" sz="1100">
+                          <a:solidFill>
+                            <a:srgbClr val="FFFFFF"/>
+                          </a:solidFill>
+                        </a:defRPr>
+                      </a:pPr>
+                      <a:r>
+                        <a:t>エリア</a:t>
+                      </a:r>
+                    </a:p>
+                  </a:txBody>
+                  <a:tcPr>
+                    <a:solidFill>
+                      <a:srgbClr val="005BAC"/>
+                    </a:solidFill>
+                  </a:tcPr>
+                </a:tc>
+                <a:tc>
+                  <a:txBody>
+                    <a:bodyPr/>
+                    <a:lstStyle/>
+                    <a:p>
+                      <a:pPr algn="ctr">
+                        <a:defRPr b="1" sz="1100">
+                          <a:solidFill>
+                            <a:srgbClr val="FFFFFF"/>
+                          </a:solidFill>
+                        </a:defRPr>
+                      </a:pPr>
+                      <a:r>
+                        <a:t>競合店舗名</a:t>
+                      </a:r>
+                    </a:p>
+                  </a:txBody>
+                  <a:tcPr>
+                    <a:solidFill>
+                      <a:srgbClr val="005BAC"/>
+                    </a:solidFill>
+                  </a:tcPr>
+                </a:tc>
+                <a:tc>
+                  <a:txBody>
+                    <a:bodyPr/>
+                    <a:lstStyle/>
+                    <a:p>
+                      <a:pPr algn="ctr">
+                        <a:defRPr b="1" sz="1100">
+                          <a:solidFill>
+                            <a:srgbClr val="FFFFFF"/>
+                          </a:solidFill>
+                        </a:defRPr>
+                      </a:pPr>
+                      <a:r>
+                        <a:t>時期</a:t>
+                      </a:r>
+                    </a:p>
+                  </a:txBody>
+                  <a:tcPr>
+                    <a:solidFill>
+                      <a:srgbClr val="005BAC"/>
+                    </a:solidFill>
+                  </a:tcPr>
+                </a:tc>
+                <a:tc>
+                  <a:txBody>
+                    <a:bodyPr/>
+                    <a:lstStyle/>
+                    <a:p>
+                      <a:pPr algn="ctr">
+                        <a:defRPr b="1" sz="1100">
+                          <a:solidFill>
+                            <a:srgbClr val="FFFFFF"/>
+                          </a:solidFill>
+                        </a:defRPr>
+                      </a:pPr>
+                      <a:r>
+                        <a:t>状態</a:t>
+                      </a:r>
+                    </a:p>
+                  </a:txBody>
+                  <a:tcPr>
+                    <a:solidFill>
+                      <a:srgbClr val="005BAC"/>
+                    </a:solidFill>
+                  </a:tcPr>
+                </a:tc>
+                <a:tc>
+                  <a:txBody>
+                    <a:bodyPr/>
+                    <a:lstStyle/>
+                    <a:p>
+                      <a:pPr algn="ctr">
+                        <a:defRPr b="1" sz="1100">
+                          <a:solidFill>
+                            <a:srgbClr val="FFFFFF"/>
+                          </a:solidFill>
+                        </a:defRPr>
+                      </a:pPr>
+                      <a:r>
+                        <a:t>影響店舗</a:t>
+                      </a:r>
+                    </a:p>
+                  </a:txBody>
+                  <a:tcPr>
+                    <a:solidFill>
+                      <a:srgbClr val="005BAC"/>
+                    </a:solidFill>
+                  </a:tcPr>
+                </a:tc>
+                <a:tc>
+                  <a:txBody>
+                    <a:bodyPr/>
+                    <a:lstStyle/>
+                    <a:p>
+                      <a:pPr algn="ctr">
+                        <a:defRPr b="1" sz="1100">
+                          <a:solidFill>
+                            <a:srgbClr val="FFFFFF"/>
+                          </a:solidFill>
+                        </a:defRPr>
+                      </a:pPr>
+                      <a:r>
+                        <a:t>影響レベル</a:t>
+                      </a:r>
+                    </a:p>
+                  </a:txBody>
+                  <a:tcPr>
+                    <a:solidFill>
+                      <a:srgbClr val="005BAC"/>
+                    </a:solidFill>
+                  </a:tcPr>
+                </a:tc>
+                <a:tc>
+                  <a:txBody>
+                    <a:bodyPr/>
+                    <a:lstStyle/>
+                    <a:p>
+                      <a:pPr algn="ctr">
+                        <a:defRPr b="1" sz="1100">
+                          <a:solidFill>
+                            <a:srgbClr val="FFFFFF"/>
+                          </a:solidFill>
+                        </a:defRPr>
+                      </a:pPr>
+                      <a:r>
+                        <a:t>詳細説明</a:t>
+                      </a:r>
+                    </a:p>
+                  </a:txBody>
+                  <a:tcPr>
+                    <a:solidFill>
+                      <a:srgbClr val="005BAC"/>
+                    </a:solidFill>
+                  </a:tcPr>
+                </a:tc>
+              </a:tr>
+              <a:tr h="1188720">
+                <a:tc>
+                  <a:txBody>
+                    <a:bodyPr/>
+                    <a:lstStyle/>
+                    <a:p>
+                      <a:pPr>
+                        <a:defRPr sz="950">
+                          <a:solidFill>
+                            <a:srgbClr val="1E1E1E"/>
+                          </a:solidFill>
+                        </a:defRPr>
+                      </a:pPr>
+                      <a:r>
+                        <a:t>大阪府大阪市北区</a:t>
+                      </a:r>
+                    </a:p>
+                  </a:txBody>
+                  <a:tcPr>
+                    <a:solidFill>
+                      <a:srgbClr val="F5F5F5"/>
+                    </a:solidFill>
+                  </a:tcPr>
+                </a:tc>
+                <a:tc>
+                  <a:txBody>
+                    <a:bodyPr/>
+                    <a:lstStyle/>
+                    <a:p>
+                      <a:pPr>
+                        <a:defRPr sz="950">
+                          <a:solidFill>
+                            <a:srgbClr val="1E1E1E"/>
+                          </a:solidFill>
+                        </a:defRPr>
+                      </a:pPr>
+                      <a:r>
+                        <a:t>(仮称)ライフ豊崎店</a:t>
+                      </a:r>
+                    </a:p>
+                  </a:txBody>
+                  <a:tcPr>
+                    <a:solidFill>
+                      <a:srgbClr val="F5F5F5"/>
+                    </a:solidFill>
+                  </a:tcPr>
+                </a:tc>
+                <a:tc>
+                  <a:txBody>
+                    <a:bodyPr/>
+                    <a:lstStyle/>
+                    <a:p>
+                      <a:pPr>
+                        <a:defRPr sz="950">
+                          <a:solidFill>
+                            <a:srgbClr val="1E1E1E"/>
+                          </a:solidFill>
+                        </a:defRPr>
+                      </a:pPr>
+                      <a:r>
+                        <a:t>2026年8月4日ごろ</a:t>
+                      </a:r>
+                    </a:p>
+                  </a:txBody>
+                  <a:tcPr>
+                    <a:solidFill>
+                      <a:srgbClr val="F5F5F5"/>
+                    </a:solidFill>
+                  </a:tcPr>
+                </a:tc>
+                <a:tc>
+                  <a:txBody>
+                    <a:bodyPr/>
+                    <a:lstStyle/>
+                    <a:p>
+                      <a:pPr>
+                        <a:defRPr sz="950">
+                          <a:solidFill>
+                            <a:srgbClr val="1E1E1E"/>
+                          </a:solidFill>
+                        </a:defRPr>
+                      </a:pPr>
+                      <a:r>
+                        <a:t>新規オープン</a:t>
+                      </a:r>
+                    </a:p>
+                  </a:txBody>
+                  <a:tcPr>
+                    <a:solidFill>
+                      <a:srgbClr val="F5F5F5"/>
+                    </a:solidFill>
+                  </a:tcPr>
+                </a:tc>
+                <a:tc>
+                  <a:txBody>
+                    <a:bodyPr/>
+                    <a:lstStyle/>
+                    <a:p>
+                      <a:pPr>
+                        <a:defRPr sz="950">
+                          <a:solidFill>
+                            <a:srgbClr val="1E1E1E"/>
+                          </a:solidFill>
+                        </a:defRPr>
+                      </a:pPr>
+                      <a:r>
+                        <a:t>JR大阪店</a:t>
+                      </a:r>
+                    </a:p>
+                  </a:txBody>
+                  <a:tcPr>
+                    <a:solidFill>
+                      <a:srgbClr val="F5F5F5"/>
+                    </a:solidFill>
+                  </a:tcPr>
+                </a:tc>
+                <a:tc>
+                  <a:txBody>
+                    <a:bodyPr/>
+                    <a:lstStyle/>
+                    <a:p>
+                      <a:pPr>
+                        <a:defRPr sz="950">
+                          <a:solidFill>
+                            <a:srgbClr val="1E1E1E"/>
+                          </a:solidFill>
+                        </a:defRPr>
+                      </a:pPr>
+                      <a:r>
+                        <a:t>中程度</a:t>
+                      </a:r>
+                    </a:p>
+                  </a:txBody>
+                  <a:tcPr>
+                    <a:solidFill>
+                      <a:srgbClr val="F5F5F5"/>
+                    </a:solidFill>
+                  </a:tcPr>
+                </a:tc>
+                <a:tc>
+                  <a:txBody>
+                    <a:bodyPr/>
+                    <a:lstStyle/>
+                    <a:p>
+                      <a:pPr>
+                        <a:defRPr sz="950">
+                          <a:solidFill>
+                            <a:srgbClr val="1E1E1E"/>
+                          </a:solidFill>
+                        </a:defRPr>
+                      </a:pPr>
+                      <a:r>
+                        <a:t>ライフコーポレーションが大阪市北区に新たなスーパーマーケットを開業します。 広い営業時間（午前7時から翌午前2時まで）を設定し、利便性を追求しており、梅田・大阪駅周辺の顧客層への影響が予想されます。</a:t>
+                      </a:r>
+                    </a:p>
+                  </a:txBody>
+                  <a:tcPr>
+                    <a:solidFill>
+                      <a:srgbClr val="F5F5F5"/>
+                    </a:solidFill>
+                  </a:tcPr>
+                </a:tc>
+              </a:tr>
+              <a:tr h="1188720">
+                <a:tc>
+                  <a:txBody>
+                    <a:bodyPr/>
+                    <a:lstStyle/>
+                    <a:p>
+                      <a:pPr>
+                        <a:defRPr sz="950">
+                          <a:solidFill>
+                            <a:srgbClr val="1E1E1E"/>
+                          </a:solidFill>
+                        </a:defRPr>
+                      </a:pPr>
+                      <a:r>
+                        <a:t>大阪府東大阪市</a:t>
+                      </a:r>
+                    </a:p>
+                  </a:txBody>
+                  <a:tcPr/>
+                </a:tc>
+                <a:tc>
+                  <a:txBody>
+                    <a:bodyPr/>
+                    <a:lstStyle/>
+                    <a:p>
+                      <a:pPr>
+                        <a:defRPr sz="950">
+                          <a:solidFill>
+                            <a:srgbClr val="1E1E1E"/>
+                          </a:solidFill>
+                        </a:defRPr>
+                      </a:pPr>
+                      <a:r>
+                        <a:t>(仮称)万代荒本店</a:t>
+                      </a:r>
+                    </a:p>
+                  </a:txBody>
+                  <a:tcPr/>
+                </a:tc>
+                <a:tc>
+                  <a:txBody>
+                    <a:bodyPr/>
+                    <a:lstStyle/>
+                    <a:p>
+                      <a:pPr>
+                        <a:defRPr sz="950">
+                          <a:solidFill>
+                            <a:srgbClr val="1E1E1E"/>
+                          </a:solidFill>
+                        </a:defRPr>
+                      </a:pPr>
+                      <a:r>
+                        <a:t>2026年9月21日</a:t>
+                      </a:r>
+                    </a:p>
+                  </a:txBody>
+                  <a:tcPr/>
+                </a:tc>
+                <a:tc>
+                  <a:txBody>
+                    <a:bodyPr/>
+                    <a:lstStyle/>
+                    <a:p>
+                      <a:pPr>
+                        <a:defRPr sz="950">
+                          <a:solidFill>
+                            <a:srgbClr val="1E1E1E"/>
+                          </a:solidFill>
+                        </a:defRPr>
+                      </a:pPr>
+                      <a:r>
+                        <a:t>新規オープン</a:t>
+                      </a:r>
+                    </a:p>
+                  </a:txBody>
+                  <a:tcPr/>
+                </a:tc>
+                <a:tc>
+                  <a:txBody>
+                    <a:bodyPr/>
+                    <a:lstStyle/>
+                    <a:p>
+                      <a:pPr>
+                        <a:defRPr sz="950">
+                          <a:solidFill>
+                            <a:srgbClr val="1E1E1E"/>
+                          </a:solidFill>
+                        </a:defRPr>
+                      </a:pPr>
+                      <a:r>
+                        <a:t>JR大阪店</a:t>
+                      </a:r>
+                    </a:p>
+                  </a:txBody>
+                  <a:tcPr/>
+                </a:tc>
+                <a:tc>
+                  <a:txBody>
+                    <a:bodyPr/>
+                    <a:lstStyle/>
+                    <a:p>
+                      <a:pPr>
+                        <a:defRPr sz="950">
+                          <a:solidFill>
+                            <a:srgbClr val="1E1E1E"/>
+                          </a:solidFill>
+                        </a:defRPr>
+                      </a:pPr>
+                      <a:r>
+                        <a:t>中程度</a:t>
+                      </a:r>
+                    </a:p>
+                  </a:txBody>
+                  <a:tcPr/>
+                </a:tc>
+                <a:tc>
+                  <a:txBody>
+                    <a:bodyPr/>
+                    <a:lstStyle/>
+                    <a:p>
+                      <a:pPr>
+                        <a:defRPr sz="950">
+                          <a:solidFill>
+                            <a:srgbClr val="1E1E1E"/>
+                          </a:solidFill>
+                        </a:defRPr>
+                      </a:pPr>
+                      <a:r>
+                        <a:t>万代が東大阪市に新店舗をオープンする予定です。 店舗面積は1563㎡で、地域住民の日常使いのスーパーマーケットとして競争が活発化すると考えられます。</a:t>
+                      </a:r>
+                    </a:p>
+                  </a:txBody>
+                  <a:tcPr/>
+                </a:tc>
+              </a:tr>
+              <a:tr h="1188720">
+                <a:tc>
+                  <a:txBody>
+                    <a:bodyPr/>
+                    <a:lstStyle/>
+                    <a:p>
+                      <a:pPr>
+                        <a:defRPr sz="950">
+                          <a:solidFill>
+                            <a:srgbClr val="1E1E1E"/>
+                          </a:solidFill>
+                        </a:defRPr>
+                      </a:pPr>
+                      <a:r>
+                        <a:t>大阪府和泉市</a:t>
+                      </a:r>
+                    </a:p>
+                  </a:txBody>
+                  <a:tcPr>
+                    <a:solidFill>
+                      <a:srgbClr val="F5F5F5"/>
+                    </a:solidFill>
+                  </a:tcPr>
+                </a:tc>
+                <a:tc>
+                  <a:txBody>
+                    <a:bodyPr/>
+                    <a:lstStyle/>
+                    <a:p>
+                      <a:pPr>
+                        <a:defRPr sz="950">
+                          <a:solidFill>
+                            <a:srgbClr val="1E1E1E"/>
+                          </a:solidFill>
+                        </a:defRPr>
+                      </a:pPr>
+                      <a:r>
+                        <a:t>(仮称)和泉市観音寺複合施設</a:t>
+                      </a:r>
+                    </a:p>
+                  </a:txBody>
+                  <a:tcPr>
+                    <a:solidFill>
+                      <a:srgbClr val="F5F5F5"/>
+                    </a:solidFill>
+                  </a:tcPr>
+                </a:tc>
+                <a:tc>
+                  <a:txBody>
+                    <a:bodyPr/>
+                    <a:lstStyle/>
+                    <a:p>
+                      <a:pPr>
+                        <a:defRPr sz="950">
+                          <a:solidFill>
+                            <a:srgbClr val="1E1E1E"/>
+                          </a:solidFill>
+                        </a:defRPr>
+                      </a:pPr>
+                      <a:r>
+                        <a:t>2026年11月14日</a:t>
+                      </a:r>
+                    </a:p>
+                  </a:txBody>
+                  <a:tcPr>
+                    <a:solidFill>
+                      <a:srgbClr val="F5F5F5"/>
+                    </a:solidFill>
+                  </a:tcPr>
+                </a:tc>
+                <a:tc>
+                  <a:txBody>
+                    <a:bodyPr/>
+                    <a:lstStyle/>
+                    <a:p>
+                      <a:pPr>
+                        <a:defRPr sz="950">
+                          <a:solidFill>
+                            <a:srgbClr val="1E1E1E"/>
+                          </a:solidFill>
+                        </a:defRPr>
+                      </a:pPr>
+                      <a:r>
+                        <a:t>新規オープン</a:t>
+                      </a:r>
+                    </a:p>
+                  </a:txBody>
+                  <a:tcPr>
+                    <a:solidFill>
+                      <a:srgbClr val="F5F5F5"/>
+                    </a:solidFill>
+                  </a:tcPr>
+                </a:tc>
+                <a:tc>
+                  <a:txBody>
+                    <a:bodyPr/>
+                    <a:lstStyle/>
+                    <a:p>
+                      <a:pPr>
+                        <a:defRPr sz="950">
+                          <a:solidFill>
+                            <a:srgbClr val="1E1E1E"/>
+                          </a:solidFill>
+                        </a:defRPr>
+                      </a:pPr>
+                      <a:r>
+                        <a:t>南海なんば店</a:t>
+                      </a:r>
+                    </a:p>
+                  </a:txBody>
+                  <a:tcPr>
+                    <a:solidFill>
+                      <a:srgbClr val="F5F5F5"/>
+                    </a:solidFill>
+                  </a:tcPr>
+                </a:tc>
+                <a:tc>
+                  <a:txBody>
+                    <a:bodyPr/>
+                    <a:lstStyle/>
+                    <a:p>
+                      <a:pPr>
+                        <a:defRPr sz="950">
+                          <a:solidFill>
+                            <a:srgbClr val="1E1E1E"/>
+                          </a:solidFill>
+                        </a:defRPr>
+                      </a:pPr>
+                      <a:r>
+                        <a:t>中程度</a:t>
+                      </a:r>
+                    </a:p>
+                  </a:txBody>
+                  <a:tcPr>
+                    <a:solidFill>
+                      <a:srgbClr val="F5F5F5"/>
+                    </a:solidFill>
+                  </a:tcPr>
+                </a:tc>
+                <a:tc>
+                  <a:txBody>
+                    <a:bodyPr/>
+                    <a:lstStyle/>
+                    <a:p>
+                      <a:pPr>
+                        <a:defRPr sz="950">
+                          <a:solidFill>
+                            <a:srgbClr val="1E1E1E"/>
+                          </a:solidFill>
+                        </a:defRPr>
+                      </a:pPr>
+                      <a:r>
+                        <a:t>大和ハウスリアルティマネジメントが開発する複合施設内に万代が出店予定です。 店舗面積は6460㎡と大規模であり、広域からの集客が予想され、南大阪エリアの競争環境に影響を与える可能性があります。</a:t>
+                      </a:r>
+                    </a:p>
+                  </a:txBody>
+                  <a:tcPr>
+                    <a:solidFill>
+                      <a:srgbClr val="F5F5F5"/>
+                    </a:solidFill>
+                  </a:tcPr>
+                </a:tc>
+              </a:tr>
+            </a:tbl>
+          </a:graphicData>
+        </a:graphic>
+      </p:graphicFrame>
     </p:spTree>
   </p:cSld>
   <p:clrMapOvr>
@@ -4448,7 +5186,7 @@
               </a:defRPr>
             </a:pPr>
             <a:r>
-              <a:t>d) 【影響分析】</a:t>
+              <a:t>c) 【地図的分析】</a:t>
             </a:r>
           </a:p>
         </p:txBody>
@@ -4477,32 +5215,24 @@
           <a:p>
             <a:pPr>
               <a:spcAft>
-                <a:spcPts val="1200"/>
+                <a:spcPts val="1400"/>
               </a:spcAft>
-              <a:defRPr sz="1350">
+              <a:defRPr sz="1400">
                 <a:solidFill>
                   <a:srgbClr val="1E1E1E"/>
                 </a:solidFill>
               </a:defRPr>
             </a:pPr>
             <a:r>
-              <a:t>阪急オアシスデイリーマート服部西店の価格訴求型への業態転換は、いかりスーパーの高級路線とは異なるものの、豊中エリアの顧客が価格帯の異なる店舗を使い分ける動きが加速する可能性があります。特に、日々の買い物をより手頃な価格で済ませたい顧客層がデイリーマートに流れることで、いかりスーパーは高品質・高付加価値戦略を一層明確にし、客層の維持・強化を図る必要が生じます。</a:t>
+              <a:t>コープこうべが営業終了候補店としている店舗のうち、コープ吹田はいかり王子店（吹田市）から比較的近く、閉店に至った場合、当該エリアでの競争緩和が期待されます。また、コープミニけやき坂（川西市）は、いかり宝塚店、阪急逆瀬川店、箕面店などの北摂エリアの店舗網から見て、比較的近い位置にあり、今後の動向が注目されます。</a:t>
             </a:r>
             <a:br/>
             <a:r>
-              <a:t>オーケーの高槻赤大路店、長吉店という大阪府内での連続出店は、関西全体でディスカウントスーパーの存在感を高める動きと捉えられます。いかりスーパーは高品質な商品とサービスで差別化を図っていますが、オーケーの「高品質・Everyday Low Price」戦略は、一部の顧客層にとって魅力的な選択肢となり得るため、いかりスーパーの周辺店舗は、顧客ロイヤリティの強化や、品揃えの独自性をさらに際立たせる戦略が重要となります。</a:t>
+              <a:t>ライフコーポレーションの（仮称）ライフ豊崎店は大阪市北区に位置し、いかりJR大阪店から地理的に近く、梅田・大阪駅周辺のオフィスワーカーや居住者層の獲得において直接的な競合となる可能性が高いです。</a:t>
             </a:r>
             <a:br/>
             <a:r>
-              <a:t>さとうのフレッシュバザール猪名川店の新設は、兵庫県北部の郊外エリアでの競争を活発化させます。この地域では広域からの集客も予想されるため、いかりスーパーの既存店舗は、特定の顧客層に強く訴求するプロモーションや、地域に根ざしたイベントの実施などを通じて、顧客との関係性を深める必要があるでしょう。</a:t>
-            </a:r>
-            <a:br/>
-            <a:r>
-              <a:t>関西スーパー蒲生店の臨時休業後の改装が実施されれば、同店は競争力を高めて再開する可能性があります。いかりスーパーとしては、周辺地域の競合店の動向を継続的に監視し、必要に応じて自社の店舗戦略を柔軟に調整していくことが求められます。</a:t>
-            </a:r>
-            <a:br/>
-            <a:r>
-              <a:t>全体として、関西エリアのスーパーマーケット市場は、価格訴求型店舗の拡大や新規出店、既存店の改装により競争が激化しています。いかりスーパーは、その強みである高品質な商品、きめ細やかなサービス、そして独自のブランドイメージを一層強化し、顧客体験価値を高めることで、競合との差別化を図る必要があります。</a:t>
+              <a:t>万代の（仮称）荒本店（東大阪市）はいかりJR大阪店や南海なんば店からは距離があるものの、東大阪市という人口密集地への出店であり、広域的な顧客獲得競争に影響を与える可能性があります。また、（仮称）和泉市観音寺複合施設（大阪府和泉市）は大規模店舗であり、南大阪エリアにおける広範な顧客層に影響を与える可能性があり、いかり南海なんば店などの顧客層にも間接的な影響を及ぼす可能性があります。</a:t>
             </a:r>
           </a:p>
         </p:txBody>
@@ -4555,7 +5285,7 @@
               </a:defRPr>
             </a:pPr>
             <a:r>
-              <a:t>e) 【参照ソース】</a:t>
+              <a:t>d) 【影響分析】</a:t>
             </a:r>
           </a:p>
         </p:txBody>
@@ -4584,257 +5314,28 @@
           <a:p>
             <a:pPr>
               <a:spcAft>
-                <a:spcPts val="800"/>
+                <a:spcPts val="1200"/>
               </a:spcAft>
+              <a:defRPr sz="1350">
+                <a:solidFill>
+                  <a:srgbClr val="1E1E1E"/>
+                </a:solidFill>
+              </a:defRPr>
             </a:pPr>
             <a:r>
-              <a:rPr sz="1200">
-                <a:solidFill>
-                  <a:srgbClr val="1E1E1E"/>
-                </a:solidFill>
-              </a:rPr>
-              <a:t>・ </a:t>
-            </a:r>
-            <a:r>
-              <a:rPr sz="1200">
-                <a:solidFill>
-                  <a:srgbClr val="1E1E1E"/>
-                </a:solidFill>
-              </a:rPr>
-              <a:t>  </a:t>
-            </a:r>
-            <a:r>
-              <a:rPr sz="1200" u="sng">
-                <a:solidFill>
-                  <a:srgbClr val="0066CC"/>
-                </a:solidFill>
-                <a:hlinkClick r:id="rId2"/>
-              </a:rPr>
-              <a:t>阪急オアシス: HANKYU OASIS</a:t>
-            </a:r>
-          </a:p>
-          <a:p>
-            <a:pPr>
-              <a:spcAft>
-                <a:spcPts val="800"/>
-              </a:spcAft>
-            </a:pPr>
-            <a:r>
-              <a:rPr sz="1200">
-                <a:solidFill>
-                  <a:srgbClr val="1E1E1E"/>
-                </a:solidFill>
-              </a:rPr>
-              <a:t>・ </a:t>
-            </a:r>
-            <a:r>
-              <a:rPr sz="1200">
-                <a:solidFill>
-                  <a:srgbClr val="1E1E1E"/>
-                </a:solidFill>
-              </a:rPr>
-              <a:t>  </a:t>
-            </a:r>
-            <a:r>
-              <a:rPr sz="1200" u="sng">
-                <a:solidFill>
-                  <a:srgbClr val="0066CC"/>
-                </a:solidFill>
-                <a:hlinkClick r:id="rId3"/>
-              </a:rPr>
-              <a:t>関西フードマーケットnews｜阪急オアシスデイリーマート服部西店7/17改装</a:t>
-            </a:r>
-          </a:p>
-          <a:p>
-            <a:pPr>
-              <a:spcAft>
-                <a:spcPts val="800"/>
-              </a:spcAft>
-            </a:pPr>
-            <a:r>
-              <a:rPr sz="1200">
-                <a:solidFill>
-                  <a:srgbClr val="1E1E1E"/>
-                </a:solidFill>
-              </a:rPr>
-              <a:t>・ </a:t>
-            </a:r>
-            <a:r>
-              <a:rPr sz="1200">
-                <a:solidFill>
-                  <a:srgbClr val="1E1E1E"/>
-                </a:solidFill>
-              </a:rPr>
-              <a:t>  </a:t>
-            </a:r>
-            <a:r>
-              <a:rPr sz="1200" u="sng">
-                <a:solidFill>
-                  <a:srgbClr val="0066CC"/>
-                </a:solidFill>
-                <a:hlinkClick r:id="rId4"/>
-              </a:rPr>
-              <a:t>7/17（金）「阪急オアシスデイリーマート服部西店」 リニューアルオープンのお知らせ</a:t>
-            </a:r>
-          </a:p>
-          <a:p>
-            <a:pPr>
-              <a:spcAft>
-                <a:spcPts val="800"/>
-              </a:spcAft>
-            </a:pPr>
-            <a:r>
-              <a:rPr sz="1200">
-                <a:solidFill>
-                  <a:srgbClr val="1E1E1E"/>
-                </a:solidFill>
-              </a:rPr>
-              <a:t>・ </a:t>
-            </a:r>
-            <a:r>
-              <a:rPr sz="1200">
-                <a:solidFill>
-                  <a:srgbClr val="1E1E1E"/>
-                </a:solidFill>
-              </a:rPr>
-              <a:t>  </a:t>
-            </a:r>
-            <a:r>
-              <a:rPr sz="1200" u="sng">
-                <a:solidFill>
-                  <a:srgbClr val="0066CC"/>
-                </a:solidFill>
-                <a:hlinkClick r:id="rId5"/>
-              </a:rPr>
-              <a:t>関西に続々とオープン！ ディスカウント・スーパー「オーケー」 大阪府7店舗目、9月に「高槻赤大路店」を出店 ～2026年度は大阪府内に計7店舗を出店、今秋には平野区へも進出！</a:t>
-            </a:r>
-          </a:p>
-          <a:p>
-            <a:pPr>
-              <a:spcAft>
-                <a:spcPts val="800"/>
-              </a:spcAft>
-            </a:pPr>
-            <a:r>
-              <a:rPr sz="1200">
-                <a:solidFill>
-                  <a:srgbClr val="1E1E1E"/>
-                </a:solidFill>
-              </a:rPr>
-              <a:t>・ </a:t>
-            </a:r>
-            <a:r>
-              <a:rPr sz="1200">
-                <a:solidFill>
-                  <a:srgbClr val="1E1E1E"/>
-                </a:solidFill>
-              </a:rPr>
-              <a:t>  </a:t>
-            </a:r>
-            <a:r>
-              <a:rPr sz="1200" u="sng">
-                <a:solidFill>
-                  <a:srgbClr val="0066CC"/>
-                </a:solidFill>
-                <a:hlinkClick r:id="rId6"/>
-              </a:rPr>
-              <a:t>服部豊町にある「阪急オアシス服部西店」がしばらく休業するみたい Yahoo! JAPAN</a:t>
-            </a:r>
-          </a:p>
-          <a:p>
-            <a:pPr>
-              <a:spcAft>
-                <a:spcPts val="800"/>
-              </a:spcAft>
-            </a:pPr>
-            <a:r>
-              <a:rPr sz="1200">
-                <a:solidFill>
-                  <a:srgbClr val="1E1E1E"/>
-                </a:solidFill>
-              </a:rPr>
-              <a:t>・ </a:t>
-            </a:r>
-            <a:r>
-              <a:rPr sz="1200">
-                <a:solidFill>
-                  <a:srgbClr val="1E1E1E"/>
-                </a:solidFill>
-              </a:rPr>
-              <a:t>  </a:t>
-            </a:r>
-            <a:r>
-              <a:rPr sz="1200" u="sng">
-                <a:solidFill>
-                  <a:srgbClr val="0066CC"/>
-                </a:solidFill>
-                <a:hlinkClick r:id="rId7"/>
-              </a:rPr>
-              <a:t>ディスカウント・スーパーマーケット「オーケー」 大阪府での展開を加速！5月に「大東新田西町店」「豊中穂積店」を連続出店 ～2026年度は大阪府内に計7店舗の出店を予定</a:t>
-            </a:r>
-          </a:p>
-          <a:p>
-            <a:pPr>
-              <a:spcAft>
-                <a:spcPts val="800"/>
-              </a:spcAft>
-            </a:pPr>
-            <a:r>
-              <a:rPr sz="1200">
-                <a:solidFill>
-                  <a:srgbClr val="1E1E1E"/>
-                </a:solidFill>
-              </a:rPr>
-              <a:t>・ </a:t>
-            </a:r>
-            <a:r>
-              <a:rPr sz="1200">
-                <a:solidFill>
-                  <a:srgbClr val="1E1E1E"/>
-                </a:solidFill>
-              </a:rPr>
-              <a:t>  </a:t>
-            </a:r>
-            <a:r>
-              <a:rPr sz="1200" u="sng">
-                <a:solidFill>
-                  <a:srgbClr val="0066CC"/>
-                </a:solidFill>
-                <a:hlinkClick r:id="rId8"/>
-              </a:rPr>
-              <a:t>お知らせ｜関西スーパー～いつも暮らしの近くにいます～​</a:t>
-            </a:r>
-          </a:p>
-          <a:p>
-            <a:pPr>
-              <a:spcAft>
-                <a:spcPts val="800"/>
-              </a:spcAft>
-            </a:pPr>
-            <a:r>
-              <a:rPr sz="1200">
-                <a:solidFill>
-                  <a:srgbClr val="1E1E1E"/>
-                </a:solidFill>
-              </a:rPr>
-              <a:t>・ </a:t>
-            </a:r>
-            <a:r>
-              <a:rPr sz="1200">
-                <a:solidFill>
-                  <a:srgbClr val="1E1E1E"/>
-                </a:solidFill>
-              </a:rPr>
-              <a:t>  </a:t>
-            </a:r>
-            <a:r>
-              <a:rPr sz="1200" u="sng">
-                <a:solidFill>
-                  <a:srgbClr val="0066CC"/>
-                </a:solidFill>
-                <a:hlinkClick r:id="rId9"/>
-              </a:rPr>
-              <a:t>さとう／兵庫県川辺郡猪名川町に「（仮称）フレッシュバザール猪名川店」27年1月28日新設</a:t>
+              <a:t>コープこうべの営業終了候補店発表は、特に吹田市、川西市、西宮市、三木市、明石市、赤穂郡上郡町といった各地域における競合環境に変化をもたらす可能性があります。これらの店舗が実際に閉店した場合、いかりスーパーは、流出した顧客層のニーズを把握し、高品質な商品とサービスで自店舗への誘引を図る機会と捉えることができます。</a:t>
+            </a:r>
+            <a:br/>
+            <a:r>
+              <a:t>ライフコーポレーションの（仮称）ライフ豊崎店開業は、いかりJR大阪店が位置する大阪市中心部での競争を激化させます。ライフの利便性を追求した長時間営業は、特に都心部のビジネスパーソンや単身世帯の顧客層にとって魅力的な選択肢となり得ます。いかりスーパーとしては、JR大阪店において、高品質なデリや惣菜の品揃え強化、プレミアムなサービス提供を通じて、明確な差別化を図り、顧客ロイヤリティを一層高める戦略が重要となります。</a:t>
+            </a:r>
+            <a:br/>
+            <a:r>
+              <a:t>万代の東大阪市と和泉市における新規出店は、大阪府下の広範なエリアで価格競争と利便性競争を激化させる要因となります。万代は「より豊かに」「より楽しく」「より快適に」をコンセプトに近畿圏で店舗を展開しており、これらの大規模な新規店舗は、地域の顧客の多様なニーズに応えることで強い集客力を持つ可能性があります。いかりスーパーは、万代がターゲットとする広範な顧客層とは異なる、より高品質・高付加価値を求める顧客層への訴求を強化し、品揃えの独自性や店舗体験の向上に注力することで、差別化を図る必要があります。</a:t>
+            </a:r>
+            <a:br/>
+            <a:r>
+              <a:t>全体として、関西エリアのスーパーマーケット市場は、既存店の業態転換や新規出店、そして一部店舗の閉店検討など、多様な動きを見せています。いかりスーパーは、これらの競合動向を綿密に分析し、自社の強みである高品質戦略と顧客体験価値の向上を軸に、地域ごとの特性に応じた柔軟な戦略を策定・実行していくことが求められます。</a:t>
             </a:r>
           </a:p>
         </p:txBody>
@@ -4887,6 +5388,530 @@
               </a:defRPr>
             </a:pPr>
             <a:r>
+              <a:t>e) 【参照ソース】</a:t>
+            </a:r>
+          </a:p>
+        </p:txBody>
+      </p:sp>
+      <p:sp>
+        <p:nvSpPr>
+          <p:cNvPr id="3" name="TextBox 2"/>
+          <p:cNvSpPr txBox="1"/>
+          <p:nvPr/>
+        </p:nvSpPr>
+        <p:spPr>
+          <a:xfrm>
+            <a:off x="685800" y="1280160"/>
+            <a:ext cx="10817352" cy="4846320"/>
+          </a:xfrm>
+          <a:prstGeom prst="rect">
+            <a:avLst/>
+          </a:prstGeom>
+          <a:noFill/>
+        </p:spPr>
+        <p:txBody>
+          <a:bodyPr wrap="square">
+            <a:spAutoFit/>
+          </a:bodyPr>
+          <a:lstStyle/>
+          <a:p>
+            <a:pPr>
+              <a:spcAft>
+                <a:spcPts val="800"/>
+              </a:spcAft>
+            </a:pPr>
+            <a:r>
+              <a:rPr sz="1200">
+                <a:solidFill>
+                  <a:srgbClr val="1E1E1E"/>
+                </a:solidFill>
+              </a:rPr>
+              <a:t>・ </a:t>
+            </a:r>
+            <a:r>
+              <a:rPr sz="1200">
+                <a:solidFill>
+                  <a:srgbClr val="1E1E1E"/>
+                </a:solidFill>
+              </a:rPr>
+              <a:t>  </a:t>
+            </a:r>
+            <a:r>
+              <a:rPr sz="1200" u="sng">
+                <a:solidFill>
+                  <a:srgbClr val="0066CC"/>
+                </a:solidFill>
+                <a:hlinkClick r:id="rId2"/>
+              </a:rPr>
+              <a:t>阪急オアシス: HANKYU OASIS</a:t>
+            </a:r>
+          </a:p>
+          <a:p>
+            <a:pPr>
+              <a:spcAft>
+                <a:spcPts val="800"/>
+              </a:spcAft>
+            </a:pPr>
+            <a:r>
+              <a:rPr sz="1200">
+                <a:solidFill>
+                  <a:srgbClr val="1E1E1E"/>
+                </a:solidFill>
+              </a:rPr>
+              <a:t>・ </a:t>
+            </a:r>
+            <a:r>
+              <a:rPr sz="1200">
+                <a:solidFill>
+                  <a:srgbClr val="1E1E1E"/>
+                </a:solidFill>
+              </a:rPr>
+              <a:t>  </a:t>
+            </a:r>
+            <a:r>
+              <a:rPr sz="1200" u="sng">
+                <a:solidFill>
+                  <a:srgbClr val="0066CC"/>
+                </a:solidFill>
+                <a:hlinkClick r:id="rId3"/>
+              </a:rPr>
+              <a:t>関西フードマーケットnews｜阪急オアシスデイリーマート服部西店7/17改装</a:t>
+            </a:r>
+          </a:p>
+          <a:p>
+            <a:pPr>
+              <a:spcAft>
+                <a:spcPts val="800"/>
+              </a:spcAft>
+            </a:pPr>
+            <a:r>
+              <a:rPr sz="1200">
+                <a:solidFill>
+                  <a:srgbClr val="1E1E1E"/>
+                </a:solidFill>
+              </a:rPr>
+              <a:t>・ </a:t>
+            </a:r>
+            <a:r>
+              <a:rPr sz="1200">
+                <a:solidFill>
+                  <a:srgbClr val="1E1E1E"/>
+                </a:solidFill>
+              </a:rPr>
+              <a:t>  </a:t>
+            </a:r>
+            <a:r>
+              <a:rPr sz="1200" u="sng">
+                <a:solidFill>
+                  <a:srgbClr val="0066CC"/>
+                </a:solidFill>
+                <a:hlinkClick r:id="rId4"/>
+              </a:rPr>
+              <a:t>7/17（金）「阪急オアシスデイリーマート服部西店」 リニューアルオープンのお知らせ</a:t>
+            </a:r>
+          </a:p>
+          <a:p>
+            <a:pPr>
+              <a:spcAft>
+                <a:spcPts val="800"/>
+              </a:spcAft>
+            </a:pPr>
+            <a:r>
+              <a:rPr sz="1200">
+                <a:solidFill>
+                  <a:srgbClr val="1E1E1E"/>
+                </a:solidFill>
+              </a:rPr>
+              <a:t>・ </a:t>
+            </a:r>
+            <a:r>
+              <a:rPr sz="1200">
+                <a:solidFill>
+                  <a:srgbClr val="1E1E1E"/>
+                </a:solidFill>
+              </a:rPr>
+              <a:t>  </a:t>
+            </a:r>
+            <a:r>
+              <a:rPr sz="1200" u="sng">
+                <a:solidFill>
+                  <a:srgbClr val="0066CC"/>
+                </a:solidFill>
+                <a:hlinkClick r:id="rId5"/>
+              </a:rPr>
+              <a:t>関西に続々とオープン！ ディスカウント・スーパー「オーケー」 大阪府7店舗目、9月に「高槻赤大路店」を出店 ～2026年度は大阪府内に計7店舗を出店、今秋には平野区へも進出！</a:t>
+            </a:r>
+          </a:p>
+          <a:p>
+            <a:pPr>
+              <a:spcAft>
+                <a:spcPts val="800"/>
+              </a:spcAft>
+            </a:pPr>
+            <a:r>
+              <a:rPr sz="1200">
+                <a:solidFill>
+                  <a:srgbClr val="1E1E1E"/>
+                </a:solidFill>
+              </a:rPr>
+              <a:t>・ </a:t>
+            </a:r>
+            <a:r>
+              <a:rPr sz="1200">
+                <a:solidFill>
+                  <a:srgbClr val="1E1E1E"/>
+                </a:solidFill>
+              </a:rPr>
+              <a:t>  </a:t>
+            </a:r>
+            <a:r>
+              <a:rPr sz="1200" u="sng">
+                <a:solidFill>
+                  <a:srgbClr val="0066CC"/>
+                </a:solidFill>
+                <a:hlinkClick r:id="rId6"/>
+              </a:rPr>
+              <a:t>【新店情報】お買い物が、さらに充実！イオンモール堺北花田に「成城石井」のオープン告知を発見  彡 さかにゅー</a:t>
+            </a:r>
+          </a:p>
+          <a:p>
+            <a:pPr>
+              <a:spcAft>
+                <a:spcPts val="800"/>
+              </a:spcAft>
+            </a:pPr>
+            <a:r>
+              <a:rPr sz="1200">
+                <a:solidFill>
+                  <a:srgbClr val="1E1E1E"/>
+                </a:solidFill>
+              </a:rPr>
+              <a:t>・ </a:t>
+            </a:r>
+            <a:r>
+              <a:rPr sz="1200">
+                <a:solidFill>
+                  <a:srgbClr val="1E1E1E"/>
+                </a:solidFill>
+              </a:rPr>
+              <a:t>  </a:t>
+            </a:r>
+            <a:r>
+              <a:rPr sz="1200" u="sng">
+                <a:solidFill>
+                  <a:srgbClr val="0066CC"/>
+                </a:solidFill>
+                <a:hlinkClick r:id="rId7"/>
+              </a:rPr>
+              <a:t>イズミヤ・阪急オアシス、関西スーパーマーケットを2026年4月1日合併－関西フードマーケットに社名変更、H2O系食品スーパー各社ブランドは維持 | 都市商業研究所</a:t>
+            </a:r>
+          </a:p>
+          <a:p>
+            <a:pPr>
+              <a:spcAft>
+                <a:spcPts val="800"/>
+              </a:spcAft>
+            </a:pPr>
+            <a:r>
+              <a:rPr sz="1200">
+                <a:solidFill>
+                  <a:srgbClr val="1E1E1E"/>
+                </a:solidFill>
+              </a:rPr>
+              <a:t>・ </a:t>
+            </a:r>
+            <a:r>
+              <a:rPr sz="1200">
+                <a:solidFill>
+                  <a:srgbClr val="1E1E1E"/>
+                </a:solidFill>
+              </a:rPr>
+              <a:t>  </a:t>
+            </a:r>
+            <a:r>
+              <a:rPr sz="1200" u="sng">
+                <a:solidFill>
+                  <a:srgbClr val="0066CC"/>
+                </a:solidFill>
+                <a:hlinkClick r:id="rId8"/>
+              </a:rPr>
+              <a:t>コープこうべの岩山組合長、新店候補地「見つけられないのが現状」 閉店候補７店</a:t>
+            </a:r>
+          </a:p>
+          <a:p>
+            <a:pPr>
+              <a:spcAft>
+                <a:spcPts val="800"/>
+              </a:spcAft>
+            </a:pPr>
+            <a:r>
+              <a:rPr sz="1200">
+                <a:solidFill>
+                  <a:srgbClr val="1E1E1E"/>
+                </a:solidFill>
+              </a:rPr>
+              <a:t>・ </a:t>
+            </a:r>
+            <a:r>
+              <a:rPr sz="1200">
+                <a:solidFill>
+                  <a:srgbClr val="1E1E1E"/>
+                </a:solidFill>
+              </a:rPr>
+              <a:t>  </a:t>
+            </a:r>
+            <a:r>
+              <a:rPr sz="1200" u="sng">
+                <a:solidFill>
+                  <a:srgbClr val="0066CC"/>
+                </a:solidFill>
+                <a:hlinkClick r:id="rId9"/>
+              </a:rPr>
+              <a:t>ライフ 大阪市北区に新店舗設立 | 建通新聞 電子版</a:t>
+            </a:r>
+          </a:p>
+          <a:p>
+            <a:pPr>
+              <a:spcAft>
+                <a:spcPts val="800"/>
+              </a:spcAft>
+            </a:pPr>
+            <a:r>
+              <a:rPr sz="1200">
+                <a:solidFill>
+                  <a:srgbClr val="1E1E1E"/>
+                </a:solidFill>
+              </a:rPr>
+              <a:t>・ </a:t>
+            </a:r>
+            <a:r>
+              <a:rPr sz="1200">
+                <a:solidFill>
+                  <a:srgbClr val="1E1E1E"/>
+                </a:solidFill>
+              </a:rPr>
+              <a:t>  </a:t>
+            </a:r>
+            <a:r>
+              <a:rPr sz="1200" u="sng">
+                <a:solidFill>
+                  <a:srgbClr val="0066CC"/>
+                </a:solidFill>
+                <a:hlinkClick r:id="rId10"/>
+              </a:rPr>
+              <a:t>大阪市北区にスーパーを新設／２６年８月の開業めざす／ライフコーポレーション | 建設ニュース</a:t>
+            </a:r>
+          </a:p>
+          <a:p>
+            <a:pPr>
+              <a:spcAft>
+                <a:spcPts val="800"/>
+              </a:spcAft>
+            </a:pPr>
+            <a:r>
+              <a:rPr sz="1200">
+                <a:solidFill>
+                  <a:srgbClr val="1E1E1E"/>
+                </a:solidFill>
+              </a:rPr>
+              <a:t>・ </a:t>
+            </a:r>
+            <a:r>
+              <a:rPr sz="1200">
+                <a:solidFill>
+                  <a:srgbClr val="1E1E1E"/>
+                </a:solidFill>
+              </a:rPr>
+              <a:t>  </a:t>
+            </a:r>
+            <a:r>
+              <a:rPr sz="1200" u="sng">
+                <a:solidFill>
+                  <a:srgbClr val="0066CC"/>
+                </a:solidFill>
+                <a:hlinkClick r:id="rId11"/>
+              </a:rPr>
+              <a:t>万代 東大阪市内に新店舗 | 建通新聞 電子版</a:t>
+            </a:r>
+          </a:p>
+          <a:p>
+            <a:pPr>
+              <a:spcAft>
+                <a:spcPts val="800"/>
+              </a:spcAft>
+            </a:pPr>
+            <a:r>
+              <a:rPr sz="1200">
+                <a:solidFill>
+                  <a:srgbClr val="1E1E1E"/>
+                </a:solidFill>
+              </a:rPr>
+              <a:t>・ </a:t>
+            </a:r>
+            <a:r>
+              <a:rPr sz="1200">
+                <a:solidFill>
+                  <a:srgbClr val="1E1E1E"/>
+                </a:solidFill>
+              </a:rPr>
+              <a:t>  </a:t>
+            </a:r>
+            <a:r>
+              <a:rPr sz="1200" u="sng">
+                <a:solidFill>
+                  <a:srgbClr val="0066CC"/>
+                </a:solidFill>
+                <a:hlinkClick r:id="rId12"/>
+              </a:rPr>
+              <a:t>万代／大阪府東大阪市に「荒本店」9／21新設</a:t>
+            </a:r>
+          </a:p>
+          <a:p>
+            <a:pPr>
+              <a:spcAft>
+                <a:spcPts val="800"/>
+              </a:spcAft>
+            </a:pPr>
+            <a:r>
+              <a:rPr sz="1200">
+                <a:solidFill>
+                  <a:srgbClr val="1E1E1E"/>
+                </a:solidFill>
+              </a:rPr>
+              <a:t>・ </a:t>
+            </a:r>
+            <a:r>
+              <a:rPr sz="1200">
+                <a:solidFill>
+                  <a:srgbClr val="1E1E1E"/>
+                </a:solidFill>
+              </a:rPr>
+              <a:t>  </a:t>
+            </a:r>
+            <a:r>
+              <a:rPr sz="1200" u="sng">
+                <a:solidFill>
+                  <a:srgbClr val="0066CC"/>
+                </a:solidFill>
+                <a:hlinkClick r:id="rId13"/>
+              </a:rPr>
+              <a:t>万代／大阪府和泉市に「和泉市観音寺複合施設（店舗面積6460m2）」11月14日新設</a:t>
+            </a:r>
+          </a:p>
+          <a:p>
+            <a:pPr>
+              <a:spcAft>
+                <a:spcPts val="800"/>
+              </a:spcAft>
+            </a:pPr>
+            <a:r>
+              <a:rPr sz="1200">
+                <a:solidFill>
+                  <a:srgbClr val="1E1E1E"/>
+                </a:solidFill>
+              </a:rPr>
+              <a:t>・ </a:t>
+            </a:r>
+            <a:r>
+              <a:rPr sz="1200">
+                <a:solidFill>
+                  <a:srgbClr val="1E1E1E"/>
+                </a:solidFill>
+              </a:rPr>
+              <a:t>  </a:t>
+            </a:r>
+            <a:r>
+              <a:rPr sz="1200" u="sng">
+                <a:solidFill>
+                  <a:srgbClr val="0066CC"/>
+                </a:solidFill>
+                <a:hlinkClick r:id="rId14"/>
+              </a:rPr>
+              <a:t>スーパーマーケット mandai（万代）のホームページ ～ 関西圏を中心としたスーパーマーケット｜【公式】株式会社 万代</a:t>
+            </a:r>
+          </a:p>
+          <a:p>
+            <a:pPr>
+              <a:spcAft>
+                <a:spcPts val="800"/>
+              </a:spcAft>
+            </a:pPr>
+            <a:r>
+              <a:rPr sz="1200">
+                <a:solidFill>
+                  <a:srgbClr val="1E1E1E"/>
+                </a:solidFill>
+              </a:rPr>
+              <a:t>・ </a:t>
+            </a:r>
+            <a:r>
+              <a:rPr sz="1200">
+                <a:solidFill>
+                  <a:srgbClr val="1E1E1E"/>
+                </a:solidFill>
+              </a:rPr>
+              <a:t>  </a:t>
+            </a:r>
+            <a:r>
+              <a:rPr sz="1200" u="sng">
+                <a:solidFill>
+                  <a:srgbClr val="0066CC"/>
+                </a:solidFill>
+                <a:hlinkClick r:id="rId15"/>
+              </a:rPr>
+              <a:t>コープこうべが「2026年度営業終了候補店」を6店舗発表してる！明石市内では朝霧店が対象に</a:t>
+            </a:r>
+          </a:p>
+        </p:txBody>
+      </p:sp>
+    </p:spTree>
+  </p:cSld>
+  <p:clrMapOvr>
+    <a:masterClrMapping/>
+  </p:clrMapOvr>
+</p:sld>
+</file>
+
+<file path=ppt/slides/slide8.xml><?xml version="1.0" encoding="utf-8"?>
+<p:sld xmlns:a="http://schemas.openxmlformats.org/drawingml/2006/main" xmlns:p="http://schemas.openxmlformats.org/presentationml/2006/main" xmlns:r="http://schemas.openxmlformats.org/officeDocument/2006/relationships">
+  <p:cSld>
+    <p:spTree>
+      <p:nvGrpSpPr>
+        <p:cNvPr id="1" name=""/>
+        <p:cNvGrpSpPr/>
+        <p:nvPr/>
+      </p:nvGrpSpPr>
+      <p:grpSpPr/>
+      <p:sp>
+        <p:nvSpPr>
+          <p:cNvPr id="2" name="TextBox 1"/>
+          <p:cNvSpPr txBox="1"/>
+          <p:nvPr/>
+        </p:nvSpPr>
+        <p:spPr>
+          <a:xfrm>
+            <a:off x="685800" y="457200"/>
+            <a:ext cx="10817352" cy="731520"/>
+          </a:xfrm>
+          <a:prstGeom prst="rect">
+            <a:avLst/>
+          </a:prstGeom>
+          <a:noFill/>
+        </p:spPr>
+        <p:txBody>
+          <a:bodyPr wrap="square">
+            <a:spAutoFit/>
+          </a:bodyPr>
+          <a:lstStyle/>
+          <a:p>
+            <a:pPr>
+              <a:defRPr b="1" sz="2800">
+                <a:solidFill>
+                  <a:srgbClr val="005BAC"/>
+                </a:solidFill>
+              </a:defRPr>
+            </a:pPr>
+            <a:r>
               <a:t>f) 【ビジュアルマップ】</a:t>
             </a:r>
           </a:p>
@@ -4908,8 +5933,8 @@
         </p:blipFill>
         <p:spPr>
           <a:xfrm>
-            <a:off x="3483864" y="1188720"/>
-            <a:ext cx="5212080" cy="5212080"/>
+            <a:off x="2615184" y="1188720"/>
+            <a:ext cx="6949440" cy="5212080"/>
           </a:xfrm>
           <a:prstGeom prst="rect">
             <a:avLst/>
